--- a/assets/powerpoints/module-n3-epicerie/B2-dire-ou-c-est.pptx
+++ b/assets/powerpoints/module-n3-epicerie/B2-dire-ou-c-est.pptx
@@ -9931,13 +9931,76 @@
               </a:lnSpc>
             </a:pPr>
             <a:r>
+              <a:rPr sz="2000" b="1" i="0">
+                <a:solidFill>
+                  <a:srgbClr val="4B4F52"/>
+                </a:solidFill>
+                <a:latin typeface="Verdana"/>
+              </a:rPr>
+              <a:t>Au fond</a:t>
+            </a:r>
+            <a:r>
               <a:rPr sz="2000" b="0" i="0">
                 <a:solidFill>
                   <a:srgbClr val="4B4F52"/>
                 </a:solidFill>
                 <a:latin typeface="Verdana"/>
               </a:rPr>
-              <a:t>&lt;b&gt;Au fond&lt;/b&gt; parle du &lt;b&gt;magasin&lt;/b&gt; : le mur le plus loin de la porte d'entrée. &lt;b&gt;Au bout de l'allée&lt;/b&gt; parle d'une &lt;b&gt;seule rangée&lt;/b&gt; : là où elle se termine. « Tout au fond » et « au bout de l'allée cinq » n'envoient pas au même endroit.</a:t>
+              <a:t> parle du </a:t>
+            </a:r>
+            <a:r>
+              <a:rPr sz="2000" b="1" i="0">
+                <a:solidFill>
+                  <a:srgbClr val="4B4F52"/>
+                </a:solidFill>
+                <a:latin typeface="Verdana"/>
+              </a:rPr>
+              <a:t>magasin</a:t>
+            </a:r>
+            <a:r>
+              <a:rPr sz="2000" b="0" i="0">
+                <a:solidFill>
+                  <a:srgbClr val="4B4F52"/>
+                </a:solidFill>
+                <a:latin typeface="Verdana"/>
+              </a:rPr>
+              <a:t> : le mur le plus loin de la porte d'entrée. </a:t>
+            </a:r>
+            <a:r>
+              <a:rPr sz="2000" b="1" i="0">
+                <a:solidFill>
+                  <a:srgbClr val="4B4F52"/>
+                </a:solidFill>
+                <a:latin typeface="Verdana"/>
+              </a:rPr>
+              <a:t>Au bout de l'allée</a:t>
+            </a:r>
+            <a:r>
+              <a:rPr sz="2000" b="0" i="0">
+                <a:solidFill>
+                  <a:srgbClr val="4B4F52"/>
+                </a:solidFill>
+                <a:latin typeface="Verdana"/>
+              </a:rPr>
+              <a:t> parle d'une </a:t>
+            </a:r>
+            <a:r>
+              <a:rPr sz="2000" b="1" i="0">
+                <a:solidFill>
+                  <a:srgbClr val="4B4F52"/>
+                </a:solidFill>
+                <a:latin typeface="Verdana"/>
+              </a:rPr>
+              <a:t>seule rangée</a:t>
+            </a:r>
+            <a:r>
+              <a:rPr sz="2000" b="0" i="0">
+                <a:solidFill>
+                  <a:srgbClr val="4B4F52"/>
+                </a:solidFill>
+                <a:latin typeface="Verdana"/>
+              </a:rPr>
+              <a:t> : là où elle se termine. « Tout au fond » et « au bout de l'allée cinq » n'envoient pas au même endroit.</a:t>
             </a:r>
           </a:p>
         </p:txBody>
